--- a/assets/pptx/catalog-690.pptx
+++ b/assets/pptx/catalog-690.pptx
@@ -3319,7 +3319,7 @@
                 <a:ea typeface="Ebrima"/>
                 <a:cs typeface="Ebrima"/>
               </a:rPr>
-              <a:t>ታማኙ እጅህ ቤት ያደርሳል (2x)</a:t>
+              <a:t>ታማኙ እጅህ ቤት ያደርሳል 2x</a:t>
             </a:r>
           </a:p>
           <a:p>
@@ -3422,7 +3422,7 @@
                 <a:ea typeface="Ebrima"/>
                 <a:cs typeface="Ebrima"/>
               </a:rPr>
-              <a:t>የአምላኳን ውለታ ሁሌም ታስባለች (2x)</a:t>
+              <a:t>የአምላኳን ውለታ ሁሌም ታስባለች 2x</a:t>
             </a:r>
           </a:p>
         </p:txBody>
@@ -3628,7 +3628,7 @@
                 <a:ea typeface="Ebrima"/>
                 <a:cs typeface="Ebrima"/>
               </a:rPr>
-              <a:t>ሁልጊዜ አመልክሃለሁ (2x)</a:t>
+              <a:t>ሁልጊዜ አመልክሃለሁ 2x</a:t>
             </a:r>
           </a:p>
           <a:p>
@@ -3664,7 +3664,7 @@
                 <a:ea typeface="Ebrima"/>
                 <a:cs typeface="Ebrima"/>
               </a:rPr>
-              <a:t>ሁልጊዜ አመልክሃለሁ (2x)</a:t>
+              <a:t>ሁልጊዜ አመልክሃለሁ 2x</a:t>
             </a:r>
           </a:p>
           <a:p>
